--- a/dist/초3/수학/자연수계산/초3_수학_자연수계산_06_세자리수×한자리수_학생용.pptx
+++ b/dist/초3/수학/자연수계산/초3_수학_자연수계산_06_세자리수×한자리수_학생용.pptx
@@ -119,13 +119,13 @@
   <p:extLst>
     <p:ext uri="{521415D9-36F7-43E2-AB2F-B90AF26B5E84}">
       <p14:sectionLst xmlns:p14="http://schemas.microsoft.com/office/powerpoint/2010/main">
-        <p14:section name="도입" id="{4522cfc2-66ab-df89-bf20-29dba9f6a946}">
+        <p14:section name="도입" id="{bdabd739-ea07-6144-c744-f1525b7537fe}">
           <p14:sldIdLst>
             <p14:sldId id="256"/>
             <p14:sldId id="257"/>
           </p14:sldIdLst>
         </p14:section>
-        <p14:section name="개념" id="{cea96a16-7758-de6f-862a-e173a8cb8bb8}">
+        <p14:section name="개념" id="{8ea2eff8-271c-2a5e-407f-0908ea62846a}">
           <p14:sldIdLst>
             <p14:sldId id="258"/>
             <p14:sldId id="259"/>
@@ -133,31 +133,31 @@
             <p14:sldId id="262"/>
           </p14:sldIdLst>
         </p14:section>
-        <p14:section name="연습" id="{2bd0a2ce-00cd-2582-e734-6dd0d1e19acb}">
+        <p14:section name="연습" id="{23269daf-1867-4174-5605-4929633c315b}">
           <p14:sldIdLst>
             <p14:sldId id="261"/>
             <p14:sldId id="263"/>
             <p14:sldId id="264"/>
           </p14:sldIdLst>
         </p14:section>
-        <p14:section name="개념" id="{b93c02de-63c5-c91c-6147-50d1d2c5dc81}">
+        <p14:section name="개념" id="{57dbceeb-3345-7cac-90f1-29c33feb6d65}">
           <p14:sldIdLst/>
         </p14:section>
-        <p14:section name="연습" id="{01d0b8c4-657e-961a-17e8-3ef0d0110a74}">
+        <p14:section name="연습" id="{cae6634e-a523-5975-e655-ef4bc16379e1}">
           <p14:sldIdLst/>
         </p14:section>
-        <p14:section name="확인" id="{05f87cd0-9100-fdb7-4d90-03a4d90400a0}">
+        <p14:section name="확인" id="{1681c1e4-5920-c68d-3941-9554d62be286}">
           <p14:sldIdLst>
             <p14:sldId id="265"/>
             <p14:sldId id="266"/>
           </p14:sldIdLst>
         </p14:section>
-        <p14:section name="정리" id="{5c806914-9cfd-2ea5-9d6b-b09142cb9909}">
+        <p14:section name="정리" id="{6da38cf0-14cc-1427-9f8e-6d1f28440f1c}">
           <p14:sldIdLst>
             <p14:sldId id="267"/>
           </p14:sldIdLst>
         </p14:section>
-        <p14:section name="보충" id="{b0651692-4f95-f3cf-9ae7-c09ecfcc09d1}">
+        <p14:section name="보충" id="{c5efdfa4-d366-6a66-9f22-3774e5b28919}">
           <p14:sldIdLst>
             <p14:sldId id="268"/>
           </p14:sldIdLst>
@@ -2775,7 +2775,7 @@
           </p:nvPr>
         </p:nvGraphicFramePr>
         <p:xfrm>
-          <a:off x="7726680" y="965200"/>
+          <a:off x="7726680" y="1000760"/>
           <a:ext cx="3840480" cy="914400"/>
         </p:xfrm>
         <a:graphic>
@@ -2788,7 +2788,7 @@
                 <a:gridCol w="960120"/>
                 <a:gridCol w="960120"/>
               </a:tblGrid>
-              <a:tr h="568960">
+              <a:tr h="551180">
                 <a:tc>
                   <a:txBody>
                     <a:bodyPr/>
@@ -3051,7 +3051,7 @@
                   </a:tcPr>
                 </a:tc>
               </a:tr>
-              <a:tr h="568960">
+              <a:tr h="551180">
                 <a:tc>
                   <a:txBody>
                     <a:bodyPr/>
@@ -3314,7 +3314,7 @@
                   </a:tcPr>
                 </a:tc>
               </a:tr>
-              <a:tr h="568960">
+              <a:tr h="551180">
                 <a:tc>
                   <a:txBody>
                     <a:bodyPr/>
@@ -3566,7 +3566,7 @@
                   </a:tcPr>
                 </a:tc>
               </a:tr>
-              <a:tr h="568960">
+              <a:tr h="551180">
                 <a:tc>
                   <a:txBody>
                     <a:bodyPr/>
@@ -5682,7 +5682,7 @@
           </p:nvPr>
         </p:nvGraphicFramePr>
         <p:xfrm>
-          <a:off x="7483450" y="2042160"/>
+          <a:off x="7483450" y="2089785"/>
           <a:ext cx="4023360" cy="914400"/>
         </p:xfrm>
         <a:graphic>
@@ -5695,7 +5695,7 @@
                 <a:gridCol w="1005840"/>
                 <a:gridCol w="1005840"/>
               </a:tblGrid>
-              <a:tr h="609600">
+              <a:tr h="590550">
                 <a:tc>
                   <a:txBody>
                     <a:bodyPr/>
@@ -5958,7 +5958,7 @@
                   </a:tcPr>
                 </a:tc>
               </a:tr>
-              <a:tr h="609600">
+              <a:tr h="590550">
                 <a:tc>
                   <a:txBody>
                     <a:bodyPr/>
@@ -6199,7 +6199,7 @@
                   </a:tcPr>
                 </a:tc>
               </a:tr>
-              <a:tr h="609600">
+              <a:tr h="590550">
                 <a:tc>
                   <a:txBody>
                     <a:bodyPr/>
@@ -6451,7 +6451,7 @@
                   </a:tcPr>
                 </a:tc>
               </a:tr>
-              <a:tr h="609600">
+              <a:tr h="590550">
                 <a:tc>
                   <a:txBody>
                     <a:bodyPr/>
@@ -6703,7 +6703,7 @@
                   </a:tcPr>
                 </a:tc>
               </a:tr>
-              <a:tr h="609600">
+              <a:tr h="590550">
                 <a:tc>
                   <a:txBody>
                     <a:bodyPr/>
@@ -9442,7 +9442,7 @@
           </p:nvPr>
         </p:nvGraphicFramePr>
         <p:xfrm>
-          <a:off x="7590709" y="2265680"/>
+          <a:off x="7590709" y="2323465"/>
           <a:ext cx="4023360" cy="914400"/>
         </p:xfrm>
         <a:graphic>
@@ -9455,7 +9455,7 @@
                 <a:gridCol w="1005840"/>
                 <a:gridCol w="1005840"/>
               </a:tblGrid>
-              <a:tr h="528320">
+              <a:tr h="511810">
                 <a:tc>
                   <a:txBody>
                     <a:bodyPr/>
@@ -9718,7 +9718,7 @@
                   </a:tcPr>
                 </a:tc>
               </a:tr>
-              <a:tr h="528320">
+              <a:tr h="511810">
                 <a:tc>
                   <a:txBody>
                     <a:bodyPr/>
@@ -9981,7 +9981,7 @@
                   </a:tcPr>
                 </a:tc>
               </a:tr>
-              <a:tr h="528320">
+              <a:tr h="511810">
                 <a:tc>
                   <a:txBody>
                     <a:bodyPr/>
@@ -10233,7 +10233,7 @@
                   </a:tcPr>
                 </a:tc>
               </a:tr>
-              <a:tr h="528320">
+              <a:tr h="511810">
                 <a:tc>
                   <a:txBody>
                     <a:bodyPr/>
@@ -10485,7 +10485,7 @@
                   </a:tcPr>
                 </a:tc>
               </a:tr>
-              <a:tr h="528320">
+              <a:tr h="511810">
                 <a:tc>
                   <a:txBody>
                     <a:bodyPr/>
@@ -10737,7 +10737,7 @@
                   </a:tcPr>
                 </a:tc>
               </a:tr>
-              <a:tr h="528320">
+              <a:tr h="511810">
                 <a:tc>
                   <a:txBody>
                     <a:bodyPr/>
@@ -11000,7 +11000,7 @@
                   </a:tcPr>
                 </a:tc>
               </a:tr>
-              <a:tr h="528320">
+              <a:tr h="511810">
                 <a:tc>
                   <a:txBody>
                     <a:bodyPr/>
@@ -11840,7 +11840,7 @@
           </p:nvPr>
         </p:nvGraphicFramePr>
         <p:xfrm>
-          <a:off x="7483450" y="2042160"/>
+          <a:off x="7483450" y="2089785"/>
           <a:ext cx="4023360" cy="914400"/>
         </p:xfrm>
         <a:graphic>
@@ -11853,7 +11853,7 @@
                 <a:gridCol w="1005840"/>
                 <a:gridCol w="1005840"/>
               </a:tblGrid>
-              <a:tr h="609600">
+              <a:tr h="590550">
                 <a:tc>
                   <a:txBody>
                     <a:bodyPr/>
@@ -12116,7 +12116,7 @@
                   </a:tcPr>
                 </a:tc>
               </a:tr>
-              <a:tr h="609600">
+              <a:tr h="590550">
                 <a:tc>
                   <a:txBody>
                     <a:bodyPr/>
@@ -12357,7 +12357,7 @@
                   </a:tcPr>
                 </a:tc>
               </a:tr>
-              <a:tr h="609600">
+              <a:tr h="590550">
                 <a:tc>
                   <a:txBody>
                     <a:bodyPr/>
@@ -12620,7 +12620,7 @@
                   </a:tcPr>
                 </a:tc>
               </a:tr>
-              <a:tr h="609600">
+              <a:tr h="590550">
                 <a:tc>
                   <a:txBody>
                     <a:bodyPr/>
@@ -12872,7 +12872,7 @@
                   </a:tcPr>
                 </a:tc>
               </a:tr>
-              <a:tr h="609600">
+              <a:tr h="590550">
                 <a:tc>
                   <a:txBody>
                     <a:bodyPr/>
@@ -13675,7 +13675,7 @@
           </p:nvPr>
         </p:nvGraphicFramePr>
         <p:xfrm>
-          <a:off x="6947154" y="2153920"/>
+          <a:off x="6947154" y="2195195"/>
           <a:ext cx="4023360" cy="914400"/>
         </p:xfrm>
         <a:graphic>
@@ -13688,7 +13688,7 @@
                 <a:gridCol w="1005840"/>
                 <a:gridCol w="1005840"/>
               </a:tblGrid>
-              <a:tr h="528320">
+              <a:tr h="511810">
                 <a:tc>
                   <a:txBody>
                     <a:bodyPr/>
@@ -13951,7 +13951,7 @@
                   </a:tcPr>
                 </a:tc>
               </a:tr>
-              <a:tr h="528320">
+              <a:tr h="511810">
                 <a:tc>
                   <a:txBody>
                     <a:bodyPr/>
@@ -14203,7 +14203,7 @@
                   </a:tcPr>
                 </a:tc>
               </a:tr>
-              <a:tr h="528320">
+              <a:tr h="511810">
                 <a:tc>
                   <a:txBody>
                     <a:bodyPr/>
@@ -14466,7 +14466,7 @@
                   </a:tcPr>
                 </a:tc>
               </a:tr>
-              <a:tr h="528320">
+              <a:tr h="511810">
                 <a:tc>
                   <a:txBody>
                     <a:bodyPr/>
@@ -14718,7 +14718,7 @@
                   </a:tcPr>
                 </a:tc>
               </a:tr>
-              <a:tr h="528320">
+              <a:tr h="511810">
                 <a:tc>
                   <a:txBody>
                     <a:bodyPr/>
@@ -15480,7 +15480,7 @@
           </p:nvPr>
         </p:nvGraphicFramePr>
         <p:xfrm>
-          <a:off x="6920911" y="2042160"/>
+          <a:off x="6920911" y="2089785"/>
           <a:ext cx="4719401" cy="914400"/>
         </p:xfrm>
         <a:graphic>
@@ -15494,7 +15494,7 @@
                 <a:gridCol w="943880"/>
                 <a:gridCol w="943880"/>
               </a:tblGrid>
-              <a:tr h="609600">
+              <a:tr h="590550">
                 <a:tc>
                   <a:txBody>
                     <a:bodyPr/>
@@ -15825,7 +15825,7 @@
                   </a:tcPr>
                 </a:tc>
               </a:tr>
-              <a:tr h="609600">
+              <a:tr h="590550">
                 <a:tc>
                   <a:txBody>
                     <a:bodyPr/>
@@ -16134,7 +16134,7 @@
                   </a:tcPr>
                 </a:tc>
               </a:tr>
-              <a:tr h="609600">
+              <a:tr h="590550">
                 <a:tc>
                   <a:txBody>
                     <a:bodyPr/>
@@ -16454,7 +16454,7 @@
                   </a:tcPr>
                 </a:tc>
               </a:tr>
-              <a:tr h="609600">
+              <a:tr h="590550">
                 <a:tc>
                   <a:txBody>
                     <a:bodyPr/>
@@ -16763,7 +16763,7 @@
                   </a:tcPr>
                 </a:tc>
               </a:tr>
-              <a:tr h="609600">
+              <a:tr h="590550">
                 <a:tc>
                   <a:txBody>
                     <a:bodyPr/>
